--- a/figures/main-figures.pptx
+++ b/figures/main-figures.pptx
@@ -13560,7 +13560,7 @@
         </p:nvSpPr>
         <p:spPr>
           <a:xfrm>
-            <a:off x="7974248" y="12966197"/>
+            <a:off x="8222442" y="13109889"/>
             <a:ext cx="989437" cy="307777"/>
           </a:xfrm>
           <a:prstGeom prst="rect">
@@ -13585,7 +13585,7 @@
                 <a:latin typeface="Arial" panose="020B0604020202020204" pitchFamily="34" charset="0"/>
                 <a:cs typeface="Arial" panose="020B0604020202020204" pitchFamily="34" charset="0"/>
               </a:rPr>
-              <a:t>n = 189</a:t>
+              <a:t>n = 185</a:t>
             </a:r>
           </a:p>
         </p:txBody>
@@ -13604,7 +13604,7 @@
         </p:nvSpPr>
         <p:spPr>
           <a:xfrm>
-            <a:off x="4424832" y="12968727"/>
+            <a:off x="4542398" y="13099356"/>
             <a:ext cx="989437" cy="307777"/>
           </a:xfrm>
           <a:prstGeom prst="rect">
@@ -13629,7 +13629,7 @@
                 <a:latin typeface="Arial" panose="020B0604020202020204" pitchFamily="34" charset="0"/>
                 <a:cs typeface="Arial" panose="020B0604020202020204" pitchFamily="34" charset="0"/>
               </a:rPr>
-              <a:t>n = 189</a:t>
+              <a:t>n = 185</a:t>
             </a:r>
           </a:p>
         </p:txBody>
@@ -14587,6 +14587,35 @@
           </p:txBody>
         </p:sp>
       </p:grpSp>
+      <p:pic>
+        <p:nvPicPr>
+          <p:cNvPr id="62" name="Picture 61" descr="A screenshot of a cell phone&#10;&#10;Description automatically generated">
+            <a:extLst>
+              <a:ext uri="{FF2B5EF4-FFF2-40B4-BE49-F238E27FC236}">
+                <a16:creationId xmlns:a16="http://schemas.microsoft.com/office/drawing/2014/main" id="{38895FD6-BC7D-F51B-A438-C54642E499F4}"/>
+              </a:ext>
+            </a:extLst>
+          </p:cNvPr>
+          <p:cNvPicPr>
+            <a:picLocks noChangeAspect="1"/>
+          </p:cNvPicPr>
+          <p:nvPr/>
+        </p:nvPicPr>
+        <p:blipFill rotWithShape="1">
+          <a:blip r:embed="rId13"/>
+          <a:srcRect t="53472" r="51235" b="12762"/>
+          <a:stretch/>
+        </p:blipFill>
+        <p:spPr>
+          <a:xfrm>
+            <a:off x="9475345" y="6840187"/>
+            <a:ext cx="1294845" cy="1793174"/>
+          </a:xfrm>
+          <a:prstGeom prst="rect">
+            <a:avLst/>
+          </a:prstGeom>
+        </p:spPr>
+      </p:pic>
     </p:spTree>
     <p:extLst>
       <p:ext uri="{BB962C8B-B14F-4D97-AF65-F5344CB8AC3E}">
